--- a/HN_staging.pptx
+++ b/HN_staging.pptx
@@ -16,6 +16,7 @@
     <p:sldId id="265" r:id="rId10"/>
     <p:sldId id="266" r:id="rId11"/>
     <p:sldId id="268" r:id="rId12"/>
+    <p:sldId id="269" r:id="rId13"/>
   </p:sldIdLst>
   <p:sldSz cx="12192000" cy="6858000"/>
   <p:notesSz cx="6858000" cy="9144000"/>
@@ -269,7 +270,7 @@
           <a:p>
             <a:fld id="{0266D8D7-1006-9340-8393-585DE1E9BC7B}" type="datetimeFigureOut">
               <a:rPr lang="en-US" smtClean="0"/>
-              <a:t>8/9/26</a:t>
+              <a:t>8/12/26</a:t>
             </a:fld>
             <a:endParaRPr lang="en-US"/>
           </a:p>
@@ -467,7 +468,7 @@
           <a:p>
             <a:fld id="{0266D8D7-1006-9340-8393-585DE1E9BC7B}" type="datetimeFigureOut">
               <a:rPr lang="en-US" smtClean="0"/>
-              <a:t>8/9/26</a:t>
+              <a:t>8/12/26</a:t>
             </a:fld>
             <a:endParaRPr lang="en-US"/>
           </a:p>
@@ -675,7 +676,7 @@
           <a:p>
             <a:fld id="{0266D8D7-1006-9340-8393-585DE1E9BC7B}" type="datetimeFigureOut">
               <a:rPr lang="en-US" smtClean="0"/>
-              <a:t>8/9/26</a:t>
+              <a:t>8/12/26</a:t>
             </a:fld>
             <a:endParaRPr lang="en-US"/>
           </a:p>
@@ -873,7 +874,7 @@
           <a:p>
             <a:fld id="{0266D8D7-1006-9340-8393-585DE1E9BC7B}" type="datetimeFigureOut">
               <a:rPr lang="en-US" smtClean="0"/>
-              <a:t>8/9/26</a:t>
+              <a:t>8/12/26</a:t>
             </a:fld>
             <a:endParaRPr lang="en-US"/>
           </a:p>
@@ -1148,7 +1149,7 @@
           <a:p>
             <a:fld id="{0266D8D7-1006-9340-8393-585DE1E9BC7B}" type="datetimeFigureOut">
               <a:rPr lang="en-US" smtClean="0"/>
-              <a:t>8/9/26</a:t>
+              <a:t>8/12/26</a:t>
             </a:fld>
             <a:endParaRPr lang="en-US"/>
           </a:p>
@@ -1413,7 +1414,7 @@
           <a:p>
             <a:fld id="{0266D8D7-1006-9340-8393-585DE1E9BC7B}" type="datetimeFigureOut">
               <a:rPr lang="en-US" smtClean="0"/>
-              <a:t>8/9/26</a:t>
+              <a:t>8/12/26</a:t>
             </a:fld>
             <a:endParaRPr lang="en-US"/>
           </a:p>
@@ -1825,7 +1826,7 @@
           <a:p>
             <a:fld id="{0266D8D7-1006-9340-8393-585DE1E9BC7B}" type="datetimeFigureOut">
               <a:rPr lang="en-US" smtClean="0"/>
-              <a:t>8/9/26</a:t>
+              <a:t>8/12/26</a:t>
             </a:fld>
             <a:endParaRPr lang="en-US"/>
           </a:p>
@@ -1966,7 +1967,7 @@
           <a:p>
             <a:fld id="{0266D8D7-1006-9340-8393-585DE1E9BC7B}" type="datetimeFigureOut">
               <a:rPr lang="en-US" smtClean="0"/>
-              <a:t>8/9/26</a:t>
+              <a:t>8/12/26</a:t>
             </a:fld>
             <a:endParaRPr lang="en-US"/>
           </a:p>
@@ -2079,7 +2080,7 @@
           <a:p>
             <a:fld id="{0266D8D7-1006-9340-8393-585DE1E9BC7B}" type="datetimeFigureOut">
               <a:rPr lang="en-US" smtClean="0"/>
-              <a:t>8/9/26</a:t>
+              <a:t>8/12/26</a:t>
             </a:fld>
             <a:endParaRPr lang="en-US"/>
           </a:p>
@@ -2390,7 +2391,7 @@
           <a:p>
             <a:fld id="{0266D8D7-1006-9340-8393-585DE1E9BC7B}" type="datetimeFigureOut">
               <a:rPr lang="en-US" smtClean="0"/>
-              <a:t>8/9/26</a:t>
+              <a:t>8/12/26</a:t>
             </a:fld>
             <a:endParaRPr lang="en-US"/>
           </a:p>
@@ -2678,7 +2679,7 @@
           <a:p>
             <a:fld id="{0266D8D7-1006-9340-8393-585DE1E9BC7B}" type="datetimeFigureOut">
               <a:rPr lang="en-US" smtClean="0"/>
-              <a:t>8/9/26</a:t>
+              <a:t>8/12/26</a:t>
             </a:fld>
             <a:endParaRPr lang="en-US"/>
           </a:p>
@@ -2919,7 +2920,7 @@
           <a:p>
             <a:fld id="{0266D8D7-1006-9340-8393-585DE1E9BC7B}" type="datetimeFigureOut">
               <a:rPr lang="en-US" smtClean="0"/>
-              <a:t>8/9/26</a:t>
+              <a:t>8/12/26</a:t>
             </a:fld>
             <a:endParaRPr lang="en-US"/>
           </a:p>
@@ -4040,6 +4041,339 @@
     <p:extLst>
       <p:ext uri="{BB962C8B-B14F-4D97-AF65-F5344CB8AC3E}">
         <p14:creationId xmlns:p14="http://schemas.microsoft.com/office/powerpoint/2010/main" val="1129351912"/>
+      </p:ext>
+    </p:extLst>
+  </p:cSld>
+  <p:clrMapOvr>
+    <a:masterClrMapping/>
+  </p:clrMapOvr>
+</p:sld>
+</file>
+
+<file path=ppt/slides/slide12.xml><?xml version="1.0" encoding="utf-8"?>
+<p:sld xmlns:a="http://schemas.openxmlformats.org/drawingml/2006/main" xmlns:r="http://schemas.openxmlformats.org/officeDocument/2006/relationships" xmlns:p="http://schemas.openxmlformats.org/presentationml/2006/main">
+  <p:cSld>
+    <p:spTree>
+      <p:nvGrpSpPr>
+        <p:cNvPr id="1" name="">
+          <a:extLst>
+            <a:ext uri="{FF2B5EF4-FFF2-40B4-BE49-F238E27FC236}">
+              <a16:creationId xmlns:a16="http://schemas.microsoft.com/office/drawing/2014/main" id="{BC3C8628-ADCB-0BF5-017D-80AE583D8F13}"/>
+            </a:ext>
+          </a:extLst>
+        </p:cNvPr>
+        <p:cNvGrpSpPr/>
+        <p:nvPr/>
+      </p:nvGrpSpPr>
+      <p:grpSpPr>
+        <a:xfrm>
+          <a:off x="0" y="0"/>
+          <a:ext cx="0" cy="0"/>
+          <a:chOff x="0" y="0"/>
+          <a:chExt cx="0" cy="0"/>
+        </a:xfrm>
+      </p:grpSpPr>
+      <p:sp>
+        <p:nvSpPr>
+          <p:cNvPr id="4" name="TextBox 3">
+            <a:extLst>
+              <a:ext uri="{FF2B5EF4-FFF2-40B4-BE49-F238E27FC236}">
+                <a16:creationId xmlns:a16="http://schemas.microsoft.com/office/drawing/2014/main" id="{A33B93D7-4D00-3377-D9CF-B710FA840C9E}"/>
+              </a:ext>
+            </a:extLst>
+          </p:cNvPr>
+          <p:cNvSpPr txBox="1"/>
+          <p:nvPr/>
+        </p:nvSpPr>
+        <p:spPr>
+          <a:xfrm>
+            <a:off x="154237" y="104634"/>
+            <a:ext cx="3875805" cy="707886"/>
+          </a:xfrm>
+          <a:prstGeom prst="rect">
+            <a:avLst/>
+          </a:prstGeom>
+          <a:noFill/>
+        </p:spPr>
+        <p:txBody>
+          <a:bodyPr wrap="none" rtlCol="0">
+            <a:spAutoFit/>
+          </a:bodyPr>
+          <a:lstStyle/>
+          <a:p>
+            <a:r>
+              <a:rPr lang="en-US" sz="4000" dirty="0"/>
+              <a:t>Sarcoma of H&amp;N</a:t>
+            </a:r>
+          </a:p>
+        </p:txBody>
+      </p:sp>
+      <p:sp>
+        <p:nvSpPr>
+          <p:cNvPr id="13" name="TextBox 12">
+            <a:extLst>
+              <a:ext uri="{FF2B5EF4-FFF2-40B4-BE49-F238E27FC236}">
+                <a16:creationId xmlns:a16="http://schemas.microsoft.com/office/drawing/2014/main" id="{C2C34D3B-195D-E3E9-3490-108FD2F3F7EF}"/>
+              </a:ext>
+            </a:extLst>
+          </p:cNvPr>
+          <p:cNvSpPr txBox="1"/>
+          <p:nvPr/>
+        </p:nvSpPr>
+        <p:spPr>
+          <a:xfrm>
+            <a:off x="4646" y="6047914"/>
+            <a:ext cx="184731" cy="369332"/>
+          </a:xfrm>
+          <a:prstGeom prst="rect">
+            <a:avLst/>
+          </a:prstGeom>
+          <a:noFill/>
+        </p:spPr>
+        <p:txBody>
+          <a:bodyPr wrap="none" rtlCol="0">
+            <a:spAutoFit/>
+          </a:bodyPr>
+          <a:lstStyle/>
+          <a:p>
+            <a:endParaRPr lang="en-US" dirty="0"/>
+          </a:p>
+        </p:txBody>
+      </p:sp>
+      <p:pic>
+        <p:nvPicPr>
+          <p:cNvPr id="6" name="Picture 5">
+            <a:extLst>
+              <a:ext uri="{FF2B5EF4-FFF2-40B4-BE49-F238E27FC236}">
+                <a16:creationId xmlns:a16="http://schemas.microsoft.com/office/drawing/2014/main" id="{8FAE8975-EF1F-7C75-B606-FE9D2C347C81}"/>
+              </a:ext>
+            </a:extLst>
+          </p:cNvPr>
+          <p:cNvPicPr>
+            <a:picLocks noChangeAspect="1"/>
+          </p:cNvPicPr>
+          <p:nvPr/>
+        </p:nvPicPr>
+        <p:blipFill>
+          <a:blip r:embed="rId2"/>
+          <a:stretch>
+            <a:fillRect/>
+          </a:stretch>
+        </p:blipFill>
+        <p:spPr>
+          <a:xfrm>
+            <a:off x="97011" y="966353"/>
+            <a:ext cx="3330739" cy="3595255"/>
+          </a:xfrm>
+          <a:prstGeom prst="rect">
+            <a:avLst/>
+          </a:prstGeom>
+          <a:ln>
+            <a:solidFill>
+              <a:schemeClr val="accent1"/>
+            </a:solidFill>
+          </a:ln>
+        </p:spPr>
+      </p:pic>
+      <p:pic>
+        <p:nvPicPr>
+          <p:cNvPr id="8" name="Picture 7">
+            <a:extLst>
+              <a:ext uri="{FF2B5EF4-FFF2-40B4-BE49-F238E27FC236}">
+                <a16:creationId xmlns:a16="http://schemas.microsoft.com/office/drawing/2014/main" id="{F9CEAD1F-4072-77A8-CE19-D3F0FBBCC0BE}"/>
+              </a:ext>
+            </a:extLst>
+          </p:cNvPr>
+          <p:cNvPicPr>
+            <a:picLocks noChangeAspect="1"/>
+          </p:cNvPicPr>
+          <p:nvPr/>
+        </p:nvPicPr>
+        <p:blipFill>
+          <a:blip r:embed="rId3"/>
+          <a:stretch>
+            <a:fillRect/>
+          </a:stretch>
+        </p:blipFill>
+        <p:spPr>
+          <a:xfrm>
+            <a:off x="4163869" y="966353"/>
+            <a:ext cx="3421495" cy="1543778"/>
+          </a:xfrm>
+          <a:prstGeom prst="rect">
+            <a:avLst/>
+          </a:prstGeom>
+          <a:ln>
+            <a:solidFill>
+              <a:schemeClr val="accent1"/>
+            </a:solidFill>
+          </a:ln>
+        </p:spPr>
+      </p:pic>
+      <p:pic>
+        <p:nvPicPr>
+          <p:cNvPr id="10" name="Picture 9">
+            <a:extLst>
+              <a:ext uri="{FF2B5EF4-FFF2-40B4-BE49-F238E27FC236}">
+                <a16:creationId xmlns:a16="http://schemas.microsoft.com/office/drawing/2014/main" id="{A02CDA56-DEF5-46E5-E5A0-FB92C0DBF0D3}"/>
+              </a:ext>
+            </a:extLst>
+          </p:cNvPr>
+          <p:cNvPicPr>
+            <a:picLocks noChangeAspect="1"/>
+          </p:cNvPicPr>
+          <p:nvPr/>
+        </p:nvPicPr>
+        <p:blipFill>
+          <a:blip r:embed="rId4"/>
+          <a:stretch>
+            <a:fillRect/>
+          </a:stretch>
+        </p:blipFill>
+        <p:spPr>
+          <a:xfrm>
+            <a:off x="4163869" y="2763981"/>
+            <a:ext cx="4250491" cy="1543778"/>
+          </a:xfrm>
+          <a:prstGeom prst="rect">
+            <a:avLst/>
+          </a:prstGeom>
+          <a:ln>
+            <a:solidFill>
+              <a:schemeClr val="accent1"/>
+            </a:solidFill>
+          </a:ln>
+        </p:spPr>
+      </p:pic>
+      <p:pic>
+        <p:nvPicPr>
+          <p:cNvPr id="12" name="Picture 11">
+            <a:extLst>
+              <a:ext uri="{FF2B5EF4-FFF2-40B4-BE49-F238E27FC236}">
+                <a16:creationId xmlns:a16="http://schemas.microsoft.com/office/drawing/2014/main" id="{A8F78C2F-AC23-6887-3690-F08EBA6D8357}"/>
+              </a:ext>
+            </a:extLst>
+          </p:cNvPr>
+          <p:cNvPicPr>
+            <a:picLocks noChangeAspect="1"/>
+          </p:cNvPicPr>
+          <p:nvPr/>
+        </p:nvPicPr>
+        <p:blipFill>
+          <a:blip r:embed="rId5"/>
+          <a:stretch>
+            <a:fillRect/>
+          </a:stretch>
+        </p:blipFill>
+        <p:spPr>
+          <a:xfrm>
+            <a:off x="9068378" y="1514913"/>
+            <a:ext cx="1906569" cy="1990435"/>
+          </a:xfrm>
+          <a:prstGeom prst="rect">
+            <a:avLst/>
+          </a:prstGeom>
+          <a:ln>
+            <a:solidFill>
+              <a:schemeClr val="accent1"/>
+            </a:solidFill>
+          </a:ln>
+        </p:spPr>
+      </p:pic>
+      <p:sp>
+        <p:nvSpPr>
+          <p:cNvPr id="15" name="TextBox 14">
+            <a:extLst>
+              <a:ext uri="{FF2B5EF4-FFF2-40B4-BE49-F238E27FC236}">
+                <a16:creationId xmlns:a16="http://schemas.microsoft.com/office/drawing/2014/main" id="{398F8408-9576-D616-7AC9-118B8588AC66}"/>
+              </a:ext>
+            </a:extLst>
+          </p:cNvPr>
+          <p:cNvSpPr txBox="1"/>
+          <p:nvPr/>
+        </p:nvSpPr>
+        <p:spPr>
+          <a:xfrm>
+            <a:off x="0" y="5934670"/>
+            <a:ext cx="7834745" cy="923330"/>
+          </a:xfrm>
+          <a:prstGeom prst="rect">
+            <a:avLst/>
+          </a:prstGeom>
+          <a:noFill/>
+        </p:spPr>
+        <p:txBody>
+          <a:bodyPr wrap="square">
+            <a:spAutoFit/>
+          </a:bodyPr>
+          <a:lstStyle/>
+          <a:p>
+            <a:r>
+              <a:rPr lang="en-US" dirty="0">
+                <a:hlinkClick r:id="rId6"/>
+              </a:rPr>
+              <a:t>https://emedicine.medscape.com/article/2006584-overview</a:t>
+            </a:r>
+            <a:endParaRPr lang="en-US" dirty="0"/>
+          </a:p>
+          <a:p>
+            <a:r>
+              <a:rPr lang="en-US" dirty="0">
+                <a:hlinkClick r:id="rId7"/>
+              </a:rPr>
+              <a:t>https://onlinelibrary.wiley.com/doi/10.1002/hed.25701</a:t>
+            </a:r>
+          </a:p>
+          <a:p>
+            <a:r>
+              <a:rPr lang="en-US" dirty="0">
+                <a:hlinkClick r:id="rId7"/>
+              </a:rPr>
+              <a:t>https://www.redjournal.org/article/S0360-3016(23)05001-0/fulltext</a:t>
+            </a:r>
+            <a:endParaRPr lang="en-US" dirty="0"/>
+          </a:p>
+        </p:txBody>
+      </p:sp>
+      <p:sp>
+        <p:nvSpPr>
+          <p:cNvPr id="16" name="TextBox 15">
+            <a:extLst>
+              <a:ext uri="{FF2B5EF4-FFF2-40B4-BE49-F238E27FC236}">
+                <a16:creationId xmlns:a16="http://schemas.microsoft.com/office/drawing/2014/main" id="{B5CC770C-BFA0-26AA-32C9-D6392AD1B7DC}"/>
+              </a:ext>
+            </a:extLst>
+          </p:cNvPr>
+          <p:cNvSpPr txBox="1"/>
+          <p:nvPr/>
+        </p:nvSpPr>
+        <p:spPr>
+          <a:xfrm>
+            <a:off x="6713238" y="4757491"/>
+            <a:ext cx="5478762" cy="1477328"/>
+          </a:xfrm>
+          <a:prstGeom prst="rect">
+            <a:avLst/>
+          </a:prstGeom>
+          <a:noFill/>
+        </p:spPr>
+        <p:txBody>
+          <a:bodyPr wrap="square" rtlCol="0">
+            <a:spAutoFit/>
+          </a:bodyPr>
+          <a:lstStyle/>
+          <a:p>
+            <a:r>
+              <a:rPr lang="en-US" dirty="0"/>
+              <a:t>Cates (2019) and Salunkhe et al. (2023) have proposed prognostic staging groups, but none have been endorsed by the AJCC. Please disclose this to users and do not attempt to produce prognostic stage.</a:t>
+            </a:r>
+          </a:p>
+        </p:txBody>
+      </p:sp>
+    </p:spTree>
+    <p:extLst>
+      <p:ext uri="{BB962C8B-B14F-4D97-AF65-F5344CB8AC3E}">
+        <p14:creationId xmlns:p14="http://schemas.microsoft.com/office/powerpoint/2010/main" val="809324061"/>
       </p:ext>
     </p:extLst>
   </p:cSld>
